--- a/Foundation_F2/Workshop/F2-W06_Apply_Workshop_L11-L12_Pen_Friend_Application.pptx
+++ b/Foundation_F2/Workshop/F2-W06_Apply_Workshop_L11-L12_Pen_Friend_Application.pptx
@@ -39528,14 +39528,14 @@
               <a:buNone/>
             </a:pPr>
             <a:r>
-              <a:rPr lang="en-US" sz="1000" b="1" spc="150" kern="0" dirty="0">
+              <a:rPr lang="en-US" sz="1000" b="1" spc="300" kern="0" dirty="0">
                 <a:solidFill>
                   <a:srgbClr val="2F6FB0"/>
                 </a:solidFill>
                 <a:latin typeface="Calibri" pitchFamily="34" charset="0"/>
                 <a:cs typeface="Amiri" pitchFamily="2" charset="-78"/>
               </a:rPr>
-              <a:t>PART 1 · STEP 2 · WHICH LESSON? · READ EACH CARD, THEN SORT IT</a:t>
+              <a:t>PART 1 · STEP 2 · SORT IT · READ EACH CARD, THEN SORT IT</a:t>
             </a:r>
             <a:endParaRPr lang="en-US" sz="1000" dirty="0"/>
           </a:p>
@@ -39612,7 +39612,7 @@
                 <a:ea typeface="Amiri" pitchFamily="2" charset="-78"/>
                 <a:cs typeface="Amiri" pitchFamily="2" charset="-78"/>
               </a:rPr>
-              <a:t>مِنْ أَيِّ دَرْسٍ؟</a:t>
+              <a:t>صَنِّفِ البِطَاقَاتِ</a:t>
             </a:r>
             <a:endParaRPr lang="ar-SA" sz="2800" dirty="0"/>
           </a:p>
@@ -40873,7 +40873,7 @@
                 <a:ea typeface="Amiri" pitchFamily="2" charset="-78"/>
                 <a:cs typeface="Amiri" pitchFamily="2" charset="-78"/>
               </a:rPr>
-              <a:t>مِنْ أَيِّ دَرْسٍ؟</a:t>
+              <a:t>صَنِّفِ البِطَاقَاتِ</a:t>
             </a:r>
             <a:endParaRPr lang="ar-SA" sz="2800" dirty="0"/>
           </a:p>

--- a/Foundation_F2/Workshop/F2-W06_Apply_Workshop_L11-L12_Pen_Friend_Application.pptx
+++ b/Foundation_F2/Workshop/F2-W06_Apply_Workshop_L11-L12_Pen_Friend_Application.pptx
@@ -7436,7 +7436,7 @@
                 <a:latin typeface="Calibri" pitchFamily="34" charset="0"/>
                 <a:cs typeface="Amiri" pitchFamily="2" charset="-78"/>
               </a:rPr>
-              <a:t>Odd numbers come from F2-L11, even numbers from F2-L12. Core: a full sentence from the starter. Develop: add the “more” part. Stretch: link two answers with </a:t>
+              <a:t>Odd numbers come from F2-L11, even numbers from F2-L12. Core: a full sentence from the starter. Develop: add the “more” part. Stretch: link two answers with ‏</a:t>
             </a:r>
             <a:pPr algn="l" indent="0" marL="0">
               <a:buNone/>
@@ -7463,7 +7463,7 @@
                 <a:latin typeface="Calibri" pitchFamily="34" charset="0"/>
                 <a:cs typeface="Amiri" pitchFamily="2" charset="-78"/>
               </a:rPr>
-              <a:t>, </a:t>
+              <a:t>‏, ‏</a:t>
             </a:r>
             <a:pPr algn="l" indent="0" marL="0">
               <a:buNone/>
@@ -7490,7 +7490,7 @@
                 <a:latin typeface="Calibri" pitchFamily="34" charset="0"/>
                 <a:cs typeface="Amiri" pitchFamily="2" charset="-78"/>
               </a:rPr>
-              <a:t> or </a:t>
+              <a:t>‏ or ‏</a:t>
             </a:r>
             <a:pPr algn="l" indent="0" marL="0">
               <a:buNone/>
@@ -7517,7 +7517,7 @@
                 <a:latin typeface="Calibri" pitchFamily="34" charset="0"/>
                 <a:cs typeface="Amiri" pitchFamily="2" charset="-78"/>
               </a:rPr>
-              <a:t>. Swap after each question.</a:t>
+              <a:t>‏. Swap after each question.</a:t>
             </a:r>
             <a:endParaRPr lang="en-US" sz="1100" dirty="0"/>
           </a:p>
@@ -8783,7 +8783,7 @@
                 <a:latin typeface="Calibri" pitchFamily="34" charset="0"/>
                 <a:cs typeface="Amiri" pitchFamily="2" charset="-78"/>
               </a:rPr>
-              <a:t>Name your languages with </a:t>
+              <a:t>Name your languages with ‏</a:t>
             </a:r>
             <a:pPr algn="l" indent="0" marL="0">
               <a:buNone/>
@@ -8810,7 +8810,7 @@
                 <a:latin typeface="Calibri" pitchFamily="34" charset="0"/>
                 <a:cs typeface="Amiri" pitchFamily="2" charset="-78"/>
               </a:rPr>
-              <a:t>.</a:t>
+              <a:t>‏.</a:t>
             </a:r>
             <a:endParaRPr lang="en-US" sz="1100" dirty="0"/>
           </a:p>
@@ -9302,7 +9302,7 @@
                 <a:latin typeface="Calibri" pitchFamily="34" charset="0"/>
                 <a:cs typeface="Amiri" pitchFamily="2" charset="-78"/>
               </a:rPr>
-              <a:t>Give a reason with </a:t>
+              <a:t>Give a reason with ‏</a:t>
             </a:r>
             <a:pPr algn="l" indent="0" marL="0">
               <a:buNone/>
@@ -9329,7 +9329,7 @@
                 <a:latin typeface="Calibri" pitchFamily="34" charset="0"/>
                 <a:cs typeface="Amiri" pitchFamily="2" charset="-78"/>
               </a:rPr>
-              <a:t>.</a:t>
+              <a:t>‏.</a:t>
             </a:r>
             <a:endParaRPr lang="en-US" sz="1100" dirty="0"/>
           </a:p>
@@ -10894,7 +10894,7 @@
                 <a:latin typeface="Calibri" pitchFamily="34" charset="0"/>
                 <a:cs typeface="Amiri" pitchFamily="2" charset="-78"/>
               </a:rPr>
-              <a:t>Add a friend and link with </a:t>
+              <a:t>Add a friend and link with ‏</a:t>
             </a:r>
             <a:pPr algn="l" indent="0" marL="0">
               <a:buNone/>
@@ -10975,7 +10975,7 @@
                 <a:latin typeface="Calibri" pitchFamily="34" charset="0"/>
                 <a:cs typeface="Amiri" pitchFamily="2" charset="-78"/>
               </a:rPr>
-              <a:t>.</a:t>
+              <a:t>‏.</a:t>
             </a:r>
             <a:endParaRPr lang="en-US" sz="1150" dirty="0"/>
           </a:p>
@@ -11112,7 +11112,7 @@
                 <a:latin typeface="Calibri" pitchFamily="34" charset="0"/>
                 <a:cs typeface="Amiri" pitchFamily="2" charset="-78"/>
               </a:rPr>
-              <a:t>Add a reason (</a:t>
+              <a:t>Add a reason (‏</a:t>
             </a:r>
             <a:pPr algn="l" indent="0" marL="0">
               <a:buNone/>
@@ -11139,7 +11139,7 @@
                 <a:latin typeface="Calibri" pitchFamily="34" charset="0"/>
                 <a:cs typeface="Amiri" pitchFamily="2" charset="-78"/>
               </a:rPr>
-              <a:t> …) and a contrast (</a:t>
+              <a:t> …‏) and a contrast (‏</a:t>
             </a:r>
             <a:pPr algn="l" indent="0" marL="0">
               <a:buNone/>
@@ -11166,7 +11166,7 @@
                 <a:latin typeface="Calibri" pitchFamily="34" charset="0"/>
                 <a:cs typeface="Amiri" pitchFamily="2" charset="-78"/>
               </a:rPr>
-              <a:t> …).</a:t>
+              <a:t> …‏).</a:t>
             </a:r>
             <a:endParaRPr lang="en-US" sz="1150" dirty="0"/>
           </a:p>
@@ -17755,7 +17755,7 @@
                 <a:latin typeface="Calibri" pitchFamily="34" charset="0"/>
                 <a:cs typeface="Amiri" pitchFamily="2" charset="-78"/>
               </a:rPr>
-              <a:t>Evening → evening reply: </a:t>
+              <a:t>Evening → evening reply: ‏</a:t>
             </a:r>
             <a:pPr algn="l" indent="0" marL="0">
               <a:buNone/>
@@ -17782,7 +17782,7 @@
                 <a:latin typeface="Calibri" pitchFamily="34" charset="0"/>
                 <a:cs typeface="Amiri" pitchFamily="2" charset="-78"/>
               </a:rPr>
-              <a:t>.</a:t>
+              <a:t>‏.</a:t>
             </a:r>
             <a:endParaRPr lang="en-US" sz="1150" dirty="0"/>
           </a:p>
@@ -17993,7 +17993,7 @@
                 <a:latin typeface="Calibri" pitchFamily="34" charset="0"/>
                 <a:cs typeface="Amiri" pitchFamily="2" charset="-78"/>
               </a:rPr>
-              <a:t>Because I → </a:t>
+              <a:t>Because I → ‏</a:t>
             </a:r>
             <a:pPr algn="l" indent="0" marL="0">
               <a:buNone/>
@@ -18020,7 +18020,7 @@
                 <a:latin typeface="Calibri" pitchFamily="34" charset="0"/>
                 <a:cs typeface="Amiri" pitchFamily="2" charset="-78"/>
               </a:rPr>
-              <a:t>.</a:t>
+              <a:t>‏.</a:t>
             </a:r>
             <a:endParaRPr lang="en-US" sz="1150" dirty="0"/>
           </a:p>
@@ -20220,7 +20220,7 @@
                 <a:latin typeface="Calibri" pitchFamily="34" charset="0"/>
                 <a:cs typeface="Amiri" pitchFamily="2" charset="-78"/>
               </a:rPr>
-              <a:t>☐  At least one </a:t>
+              <a:t>☐  At least one ‏</a:t>
             </a:r>
             <a:pPr algn="l" indent="0" marL="0">
               <a:buNone/>
@@ -20247,7 +20247,7 @@
                 <a:latin typeface="Calibri" pitchFamily="34" charset="0"/>
                 <a:cs typeface="Amiri" pitchFamily="2" charset="-78"/>
               </a:rPr>
-              <a:t> and one </a:t>
+              <a:t>‏ and one ‏</a:t>
             </a:r>
             <a:pPr algn="l" indent="0" marL="0">
               <a:buNone/>
@@ -20274,7 +20274,7 @@
                 <a:latin typeface="Calibri" pitchFamily="34" charset="0"/>
                 <a:cs typeface="Amiri" pitchFamily="2" charset="-78"/>
               </a:rPr>
-              <a:t> (Develop).</a:t>
+              <a:t>‏ (Develop).</a:t>
             </a:r>
             <a:endParaRPr lang="en-US" sz="1200" dirty="0"/>
           </a:p>
@@ -23822,7 +23822,7 @@
                 <a:latin typeface="Calibri" pitchFamily="34" charset="0"/>
                 <a:cs typeface="Amiri" pitchFamily="2" charset="-78"/>
               </a:rPr>
-              <a:t>use the right endings for I, he and she (</a:t>
+              <a:t>use the right endings for I, he and she (‏</a:t>
             </a:r>
             <a:pPr algn="l" indent="0" marL="0">
               <a:buNone/>
@@ -23903,7 +23903,7 @@
                 <a:latin typeface="Calibri" pitchFamily="34" charset="0"/>
                 <a:cs typeface="Amiri" pitchFamily="2" charset="-78"/>
               </a:rPr>
-              <a:t>)?</a:t>
+              <a:t>‏)?</a:t>
             </a:r>
             <a:endParaRPr lang="en-US" sz="1100" dirty="0"/>
           </a:p>
@@ -24062,7 +24062,7 @@
                 <a:latin typeface="Calibri" pitchFamily="34" charset="0"/>
                 <a:cs typeface="Amiri" pitchFamily="2" charset="-78"/>
               </a:rPr>
-              <a:t>use linking words (</a:t>
+              <a:t>use linking words (‏</a:t>
             </a:r>
             <a:pPr algn="l" indent="0" marL="0">
               <a:buNone/>
@@ -24170,7 +24170,7 @@
                 <a:latin typeface="Calibri" pitchFamily="34" charset="0"/>
                 <a:cs typeface="Amiri" pitchFamily="2" charset="-78"/>
               </a:rPr>
-              <a:t>)?</a:t>
+              <a:t>‏)?</a:t>
             </a:r>
             <a:endParaRPr lang="en-US" sz="1100" dirty="0"/>
           </a:p>
@@ -28116,7 +28116,7 @@
                 <a:latin typeface="Calibri" pitchFamily="34" charset="0"/>
                 <a:cs typeface="Amiri" pitchFamily="2" charset="-78"/>
               </a:rPr>
-              <a:t>I added reasons (</a:t>
+              <a:t>I added reasons (‏</a:t>
             </a:r>
             <a:pPr algn="l" indent="0" marL="0">
               <a:buNone/>
@@ -28143,7 +28143,7 @@
                 <a:latin typeface="Calibri" pitchFamily="34" charset="0"/>
                 <a:cs typeface="Amiri" pitchFamily="2" charset="-78"/>
               </a:rPr>
-              <a:t>) and extra details without frames.</a:t>
+              <a:t>‏) and extra details without frames.</a:t>
             </a:r>
             <a:endParaRPr lang="en-US" sz="1300" dirty="0"/>
           </a:p>
@@ -32271,7 +32271,7 @@
                 <a:latin typeface="Calibri" pitchFamily="34" charset="0"/>
                 <a:cs typeface="Amiri" pitchFamily="2" charset="-78"/>
               </a:rPr>
-              <a:t>☐  Add a reason (</a:t>
+              <a:t>☐  Add a reason (‏</a:t>
             </a:r>
             <a:pPr algn="l" indent="0" marL="0">
               <a:buNone/>
@@ -32298,7 +32298,7 @@
                 <a:latin typeface="Calibri" pitchFamily="34" charset="0"/>
                 <a:cs typeface="Amiri" pitchFamily="2" charset="-78"/>
               </a:rPr>
-              <a:t>) and an extra detail to every point.</a:t>
+              <a:t>‏) and an extra detail to every point.</a:t>
             </a:r>
             <a:endParaRPr lang="en-US" sz="1300" dirty="0"/>
           </a:p>
@@ -33819,7 +33819,7 @@
                 <a:latin typeface="Calibri" pitchFamily="34" charset="0"/>
                 <a:cs typeface="Amiri" pitchFamily="2" charset="-78"/>
               </a:rPr>
-              <a:t>Join a word from each lesson in one sentence with </a:t>
+              <a:t>Join a word from each lesson in one sentence with ‏</a:t>
             </a:r>
             <a:pPr algn="l" indent="0" marL="0">
               <a:buNone/>
@@ -33846,7 +33846,7 @@
                 <a:latin typeface="Calibri" pitchFamily="34" charset="0"/>
                 <a:cs typeface="Amiri" pitchFamily="2" charset="-78"/>
               </a:rPr>
-              <a:t> or </a:t>
+              <a:t>‏ or ‏</a:t>
             </a:r>
             <a:pPr algn="l" indent="0" marL="0">
               <a:buNone/>
@@ -33873,7 +33873,7 @@
                 <a:latin typeface="Calibri" pitchFamily="34" charset="0"/>
                 <a:cs typeface="Amiri" pitchFamily="2" charset="-78"/>
               </a:rPr>
-              <a:t>.</a:t>
+              <a:t>‏.</a:t>
             </a:r>
             <a:endParaRPr lang="en-US" sz="1150" dirty="0"/>
           </a:p>
